--- a/pitch/AuroraTravels_Pitch_Deck.pptx
+++ b/pitch/AuroraTravels_Pitch_Deck.pptx
@@ -8103,6 +8103,11 @@
               <a:buNone/>
             </a:pPr>
             <a:r>
+              <a:rPr b="1">
+                <a:solidFill>
+                  <a:srgbClr val="141414"/>
+                </a:solidFill>
+              </a:rPr>
               <a:t/>
             </a:r>
             <a:endParaRPr/>
@@ -8151,7 +8156,7 @@
             <a:r>
               <a:rPr b="1" i="0" lang="en" sz="3000" u="none" cap="none" strike="noStrike">
                 <a:solidFill>
-                  <a:srgbClr val="1F2323"/>
+                  <a:srgbClr val="141414"/>
                 </a:solidFill>
                 <a:latin typeface="Google Sans"/>
                 <a:ea typeface="Google Sans"/>
@@ -8214,7 +8219,7 @@
             <a:r>
               <a:rPr b="1" i="0" lang="en" sz="1100" u="none" cap="none" strike="noStrike">
                 <a:solidFill>
-                  <a:srgbClr val="E41813"/>
+                  <a:srgbClr val="141414"/>
                 </a:solidFill>
                 <a:latin typeface="Google Sans"/>
                 <a:ea typeface="Google Sans"/>
@@ -8277,14 +8282,14 @@
             <a:r>
               <a:rPr b="1" i="1" lang="en" sz="1000" u="none" cap="none" strike="noStrike">
                 <a:solidFill>
-                  <a:srgbClr val="6B7573"/>
+                  <a:srgbClr val="141414"/>
                 </a:solidFill>
                 <a:latin typeface="Google Sans"/>
                 <a:ea typeface="Google Sans"/>
                 <a:cs typeface="Google Sans"/>
                 <a:sym typeface="Google Sans"/>
               </a:rPr>
-              <a:t>A Kenya-native app for parks, stays, verified crafts and student guides — connecting travelers to artisans and university guides with M-Pesa checkout.</a:t>
+              <a:t>KENYA · TRAVEL · CULTURE · COMMERCE</a:t>
             </a:r>
             <a:endParaRPr b="1" i="0" sz="1000" u="none" cap="none" strike="noStrike">
               <a:solidFill>
@@ -8298,7 +8303,32 @@
           </a:p>
           <a:p>
             <a:r>
-              <a:t>Built in Nairobi by ProximaOpal · auroratravels</a:t>
+              <a:rPr b="1">
+                <a:solidFill>
+                  <a:srgbClr val="141414"/>
+                </a:solidFill>
+              </a:rPr>
+              <a:t>A single, Kenya-native app for parks, stays, verified crafts and student guides — pitched for partnership and investment.</a:t>
+            </a:r>
+          </a:p>
+          <a:p>
+            <a:r>
+              <a:rPr b="1">
+                <a:solidFill>
+                  <a:srgbClr val="141414"/>
+                </a:solidFill>
+              </a:rPr>
+              <a:t>Discover 15 parks · Shop 28 verified crafts · Pay with native M-Pesa STK Push · Connect 12 university guides</a:t>
+            </a:r>
+          </a:p>
+          <a:p>
+            <a:r>
+              <a:rPr b="1">
+                <a:solidFill>
+                  <a:srgbClr val="141414"/>
+                </a:solidFill>
+              </a:rPr>
+              <a:t>Built in Nairobi by ProximaOpal — web &amp; AI product engineer · auroratravels</a:t>
             </a:r>
           </a:p>
         </p:txBody>
@@ -8478,7 +8508,7 @@
             <a:r>
               <a:rPr b="1" lang="en" sz="1700">
                 <a:solidFill>
-                  <a:srgbClr val="028F35"/>
+                  <a:srgbClr val="141414"/>
                 </a:solidFill>
                 <a:latin typeface="Google Sans"/>
                 <a:ea typeface="Google Sans"/>
@@ -8539,9 +8569,9 @@
               <a:buNone/>
             </a:pPr>
             <a:r>
-              <a:rPr b="1" lang="en" sz="800">
-                <a:solidFill>
-                  <a:srgbClr val="6B7573"/>
+              <a:rPr b="1" lang="en" sz="1000">
+                <a:solidFill>
+                  <a:srgbClr val="141414"/>
                 </a:solidFill>
                 <a:latin typeface="Google Sans"/>
                 <a:ea typeface="Google Sans"/>
@@ -8604,7 +8634,7 @@
             <a:r>
               <a:rPr b="1" lang="en" sz="2400">
                 <a:solidFill>
-                  <a:srgbClr val="1F2323"/>
+                  <a:srgbClr val="141414"/>
                 </a:solidFill>
                 <a:latin typeface="Google Sans"/>
                 <a:ea typeface="Google Sans"/>
@@ -8667,14 +8697,14 @@
             <a:r>
               <a:rPr b="1" lang="en" sz="1100">
                 <a:solidFill>
-                  <a:srgbClr val="028F35"/>
+                  <a:srgbClr val="141414"/>
                 </a:solidFill>
                 <a:latin typeface="Google Sans"/>
                 <a:ea typeface="Google Sans"/>
                 <a:cs typeface="Google Sans"/>
                 <a:sym typeface="Google Sans"/>
               </a:rPr>
-              <a:t>Why you're the right team to solve this</a:t>
+              <a:t>Why this team can build it</a:t>
             </a:r>
             <a:endParaRPr sz="1100">
               <a:solidFill>
@@ -8731,6 +8761,11 @@
               <a:buNone/>
             </a:pPr>
             <a:r>
+              <a:rPr b="1">
+                <a:solidFill>
+                  <a:srgbClr val="141414"/>
+                </a:solidFill>
+              </a:rPr>
               <a:t/>
             </a:r>
             <a:endParaRPr/>
@@ -8777,9 +8812,9 @@
               <a:buNone/>
             </a:pPr>
             <a:r>
-              <a:rPr i="1" lang="en" sz="700">
-                <a:solidFill>
-                  <a:srgbClr val="6B7573"/>
+              <a:rPr i="1" lang="en" sz="1000" b="1">
+                <a:solidFill>
+                  <a:srgbClr val="141414"/>
                 </a:solidFill>
                 <a:latin typeface="Arial"/>
                 <a:ea typeface="Arial"/>
@@ -8842,7 +8877,7 @@
             <a:r>
               <a:rPr b="1" lang="en" sz="1000">
                 <a:solidFill>
-                  <a:srgbClr val="1F2323"/>
+                  <a:srgbClr val="141414"/>
                 </a:solidFill>
                 <a:latin typeface="Nunito"/>
                 <a:ea typeface="Nunito"/>
@@ -8903,9 +8938,9 @@
               <a:buNone/>
             </a:pPr>
             <a:r>
-              <a:rPr b="1" lang="en" sz="800">
-                <a:solidFill>
-                  <a:srgbClr val="028F35"/>
+              <a:rPr b="1" lang="en" sz="1000">
+                <a:solidFill>
+                  <a:srgbClr val="141414"/>
                 </a:solidFill>
                 <a:latin typeface="Nunito"/>
                 <a:ea typeface="Nunito"/>
@@ -8966,16 +9001,16 @@
               <a:buNone/>
             </a:pPr>
             <a:r>
-              <a:rPr i="1" lang="en" sz="700">
-                <a:solidFill>
-                  <a:srgbClr val="6B7573"/>
+              <a:rPr i="1" lang="en" sz="1000" b="1">
+                <a:solidFill>
+                  <a:srgbClr val="141414"/>
                 </a:solidFill>
                 <a:latin typeface="Nunito"/>
                 <a:ea typeface="Nunito"/>
                 <a:cs typeface="Nunito"/>
                 <a:sym typeface="Nunito"/>
               </a:rPr>
-              <a:t>Nairobi-based web/AI builder; shipped Aurora Travels solo including maps, marketplace and live M-Pesa STK Push.</a:t>
+              <a:t>Web developer and UI/UX designer based in Nairobi. Designed, built and shipped Aurora Travels solo: frontend, interactive maps, craft marketplace and live M-Pesa STK Push.</a:t>
             </a:r>
             <a:endParaRPr sz="700">
               <a:solidFill>
@@ -9032,6 +9067,11 @@
               <a:buNone/>
             </a:pPr>
             <a:r>
+              <a:rPr b="1">
+                <a:solidFill>
+                  <a:srgbClr val="141414"/>
+                </a:solidFill>
+              </a:rPr>
               <a:t/>
             </a:r>
             <a:endParaRPr/>
@@ -9078,9 +9118,9 @@
               <a:buNone/>
             </a:pPr>
             <a:r>
-              <a:rPr i="1" lang="en" sz="700">
-                <a:solidFill>
-                  <a:srgbClr val="6B7573"/>
+              <a:rPr i="1" lang="en" sz="1000" b="1">
+                <a:solidFill>
+                  <a:srgbClr val="141414"/>
                 </a:solidFill>
                 <a:latin typeface="Arial"/>
                 <a:ea typeface="Arial"/>
@@ -9143,7 +9183,7 @@
             <a:r>
               <a:rPr b="1" lang="en" sz="1000">
                 <a:solidFill>
-                  <a:srgbClr val="1F2323"/>
+                  <a:srgbClr val="141414"/>
                 </a:solidFill>
                 <a:latin typeface="Nunito"/>
                 <a:ea typeface="Nunito"/>
@@ -9204,16 +9244,16 @@
               <a:buNone/>
             </a:pPr>
             <a:r>
-              <a:rPr b="1" lang="en" sz="800">
-                <a:solidFill>
-                  <a:srgbClr val="028F35"/>
+              <a:rPr b="1" lang="en" sz="1000">
+                <a:solidFill>
+                  <a:srgbClr val="141414"/>
                 </a:solidFill>
                 <a:latin typeface="Nunito"/>
                 <a:ea typeface="Nunito"/>
                 <a:cs typeface="Nunito"/>
                 <a:sym typeface="Nunito"/>
               </a:rPr>
-              <a:t>Tourism partnerships lead</a:t>
+              <a:t>Tourism &amp; hospitality partnerships lead</a:t>
             </a:r>
             <a:endParaRPr sz="800">
               <a:solidFill>
@@ -9267,9 +9307,9 @@
               <a:buNone/>
             </a:pPr>
             <a:r>
-              <a:rPr i="1" lang="en" sz="700">
-                <a:solidFill>
-                  <a:srgbClr val="6B7573"/>
+              <a:rPr i="1" lang="en" sz="1000" b="1">
+                <a:solidFill>
+                  <a:srgbClr val="141414"/>
                 </a:solidFill>
                 <a:latin typeface="Nunito"/>
                 <a:ea typeface="Nunito"/>
@@ -9333,6 +9373,11 @@
               <a:buNone/>
             </a:pPr>
             <a:r>
+              <a:rPr b="1">
+                <a:solidFill>
+                  <a:srgbClr val="141414"/>
+                </a:solidFill>
+              </a:rPr>
               <a:t/>
             </a:r>
             <a:endParaRPr/>
@@ -9379,9 +9424,9 @@
               <a:buNone/>
             </a:pPr>
             <a:r>
-              <a:rPr i="1" lang="en" sz="700">
-                <a:solidFill>
-                  <a:srgbClr val="6B7573"/>
+              <a:rPr i="1" lang="en" sz="1000" b="1">
+                <a:solidFill>
+                  <a:srgbClr val="141414"/>
                 </a:solidFill>
                 <a:latin typeface="Arial"/>
                 <a:ea typeface="Arial"/>
@@ -9444,7 +9489,7 @@
             <a:r>
               <a:rPr b="1" lang="en" sz="1000">
                 <a:solidFill>
-                  <a:srgbClr val="1F2323"/>
+                  <a:srgbClr val="141414"/>
                 </a:solidFill>
                 <a:latin typeface="Nunito"/>
                 <a:ea typeface="Nunito"/>
@@ -9505,9 +9550,9 @@
               <a:buNone/>
             </a:pPr>
             <a:r>
-              <a:rPr b="1" lang="en" sz="800">
-                <a:solidFill>
-                  <a:srgbClr val="028F35"/>
+              <a:rPr b="1" lang="en" sz="1000">
+                <a:solidFill>
+                  <a:srgbClr val="141414"/>
                 </a:solidFill>
                 <a:latin typeface="Nunito"/>
                 <a:ea typeface="Nunito"/>
@@ -9568,9 +9613,9 @@
               <a:buNone/>
             </a:pPr>
             <a:r>
-              <a:rPr i="1" lang="en" sz="700">
-                <a:solidFill>
-                  <a:srgbClr val="6B7573"/>
+              <a:rPr i="1" lang="en" sz="1000" b="1">
+                <a:solidFill>
+                  <a:srgbClr val="141414"/>
                 </a:solidFill>
                 <a:latin typeface="Nunito"/>
                 <a:ea typeface="Nunito"/>
@@ -9634,6 +9679,11 @@
               <a:buNone/>
             </a:pPr>
             <a:r>
+              <a:rPr b="1">
+                <a:solidFill>
+                  <a:srgbClr val="141414"/>
+                </a:solidFill>
+              </a:rPr>
               <a:t/>
             </a:r>
             <a:endParaRPr/>
@@ -9680,9 +9730,9 @@
               <a:buNone/>
             </a:pPr>
             <a:r>
-              <a:rPr i="1" lang="en" sz="700">
-                <a:solidFill>
-                  <a:srgbClr val="6B7573"/>
+              <a:rPr i="1" lang="en" sz="1000" b="1">
+                <a:solidFill>
+                  <a:srgbClr val="141414"/>
                 </a:solidFill>
                 <a:latin typeface="Arial"/>
                 <a:ea typeface="Arial"/>
@@ -9745,7 +9795,7 @@
             <a:r>
               <a:rPr b="1" lang="en" sz="1000">
                 <a:solidFill>
-                  <a:srgbClr val="1F2323"/>
+                  <a:srgbClr val="141414"/>
                 </a:solidFill>
                 <a:latin typeface="Nunito"/>
                 <a:ea typeface="Nunito"/>
@@ -9806,9 +9856,9 @@
               <a:buNone/>
             </a:pPr>
             <a:r>
-              <a:rPr b="1" lang="en" sz="800">
-                <a:solidFill>
-                  <a:srgbClr val="028F35"/>
+              <a:rPr b="1" lang="en" sz="1000">
+                <a:solidFill>
+                  <a:srgbClr val="141414"/>
                 </a:solidFill>
                 <a:latin typeface="Nunito"/>
                 <a:ea typeface="Nunito"/>
@@ -9869,9 +9919,9 @@
               <a:buNone/>
             </a:pPr>
             <a:r>
-              <a:rPr i="1" lang="en" sz="700">
-                <a:solidFill>
-                  <a:srgbClr val="6B7573"/>
+              <a:rPr i="1" lang="en" sz="1000" b="1">
+                <a:solidFill>
+                  <a:srgbClr val="141414"/>
                 </a:solidFill>
                 <a:latin typeface="Nunito"/>
                 <a:ea typeface="Nunito"/>
@@ -10040,7 +10090,7 @@
             <a:r>
               <a:rPr b="1" lang="en" sz="1700">
                 <a:solidFill>
-                  <a:srgbClr val="028F35"/>
+                  <a:srgbClr val="141414"/>
                 </a:solidFill>
                 <a:latin typeface="Google Sans"/>
                 <a:ea typeface="Google Sans"/>
@@ -10101,9 +10151,9 @@
               <a:buNone/>
             </a:pPr>
             <a:r>
-              <a:rPr b="1" lang="en" sz="800">
-                <a:solidFill>
-                  <a:srgbClr val="6B7573"/>
+              <a:rPr b="1" lang="en" sz="1000">
+                <a:solidFill>
+                  <a:srgbClr val="141414"/>
                 </a:solidFill>
                 <a:latin typeface="Google Sans"/>
                 <a:ea typeface="Google Sans"/>
@@ -10166,7 +10216,7 @@
             <a:r>
               <a:rPr b="1" lang="en" sz="2400">
                 <a:solidFill>
-                  <a:srgbClr val="1F2323"/>
+                  <a:srgbClr val="141414"/>
                 </a:solidFill>
                 <a:latin typeface="Google Sans"/>
                 <a:ea typeface="Google Sans"/>
@@ -10229,14 +10279,14 @@
             <a:r>
               <a:rPr b="1" lang="en" sz="1100">
                 <a:solidFill>
-                  <a:srgbClr val="028F35"/>
+                  <a:srgbClr val="141414"/>
                 </a:solidFill>
                 <a:latin typeface="Google Sans"/>
                 <a:ea typeface="Google Sans"/>
                 <a:cs typeface="Google Sans"/>
                 <a:sym typeface="Google Sans"/>
               </a:rPr>
-              <a:t>What you need, and what it enables</a:t>
+              <a:t>What Aurora Travels needs, and what it enables</a:t>
             </a:r>
             <a:endParaRPr sz="1100">
               <a:solidFill>
@@ -10295,6 +10345,11 @@
               <a:buNone/>
             </a:pPr>
             <a:r>
+              <a:rPr b="1">
+                <a:solidFill>
+                  <a:srgbClr val="141414"/>
+                </a:solidFill>
+              </a:rPr>
               <a:t/>
             </a:r>
             <a:endParaRPr>
@@ -10349,16 +10404,16 @@
               <a:buNone/>
             </a:pPr>
             <a:r>
-              <a:rPr i="1" lang="en" sz="1000">
-                <a:solidFill>
-                  <a:srgbClr val="6B7573"/>
+              <a:rPr i="1" lang="en" sz="1000" b="1">
+                <a:solidFill>
+                  <a:srgbClr val="141414"/>
                 </a:solidFill>
                 <a:latin typeface="Nunito"/>
                 <a:ea typeface="Nunito"/>
                 <a:cs typeface="Nunito"/>
                 <a:sym typeface="Nunito"/>
               </a:rPr>
-              <a:t>Funding / support requested</a:t>
+              <a:t>SEED / PARTNERSHIP CAPITAL</a:t>
             </a:r>
             <a:endParaRPr sz="1000">
               <a:solidFill>
@@ -10389,7 +10444,12 @@
               <a:buNone/>
             </a:pPr>
             <a:r>
-              <a:t>US$180,000 (~KES 23.4M at ~130 KES/USD) — 18-month Nairobi + Maasai Mara pilot.</a:t>
+              <a:rPr b="1">
+                <a:solidFill>
+                  <a:srgbClr val="141414"/>
+                </a:solidFill>
+              </a:rPr>
+              <a:t>US$180,000 ≈ KES 23.4 million (at ~130 KES/USD) — 18-month Nairobi + Maasai Mara pilot.</a:t>
             </a:r>
             <a:endParaRPr sz="1000">
               <a:solidFill>
@@ -10420,9 +10480,9 @@
               <a:buNone/>
             </a:pPr>
             <a:r>
-              <a:rPr i="1" lang="en" sz="1000">
-                <a:solidFill>
-                  <a:srgbClr val="6B7573"/>
+              <a:rPr i="1" lang="en" sz="1000" b="1">
+                <a:solidFill>
+                  <a:srgbClr val="141414"/>
                 </a:solidFill>
                 <a:latin typeface="Nunito"/>
                 <a:ea typeface="Nunito"/>
@@ -10460,16 +10520,16 @@
               <a:buNone/>
             </a:pPr>
             <a:r>
-              <a:rPr i="1" lang="en" sz="1000">
-                <a:solidFill>
-                  <a:srgbClr val="6B7573"/>
+              <a:rPr i="1" lang="en" sz="1000" b="1">
+                <a:solidFill>
+                  <a:srgbClr val="141414"/>
                 </a:solidFill>
                 <a:latin typeface="Nunito"/>
                 <a:ea typeface="Nunito"/>
                 <a:cs typeface="Nunito"/>
                 <a:sym typeface="Nunito"/>
               </a:rPr>
-              <a:t>Use of funds:</a:t>
+              <a:t>USE OF FUNDS:</a:t>
             </a:r>
             <a:endParaRPr sz="1000">
               <a:solidFill>
@@ -10500,6 +10560,11 @@
               <a:buNone/>
             </a:pPr>
             <a:r>
+              <a:rPr b="1">
+                <a:solidFill>
+                  <a:srgbClr val="141414"/>
+                </a:solidFill>
+              </a:rPr>
               <a:t>• Product &amp; engineering — 40% (US$72,000)</a:t>
             </a:r>
             <a:endParaRPr sz="1000">
@@ -10531,9 +10596,9 @@
               <a:buNone/>
             </a:pPr>
             <a:r>
-              <a:rPr i="1" lang="en" sz="1000">
-                <a:solidFill>
-                  <a:srgbClr val="6B7573"/>
+              <a:rPr i="1" lang="en" sz="1000" b="1">
+                <a:solidFill>
+                  <a:srgbClr val="141414"/>
                 </a:solidFill>
                 <a:latin typeface="Nunito"/>
                 <a:ea typeface="Nunito"/>
@@ -10571,9 +10636,9 @@
               <a:buNone/>
             </a:pPr>
             <a:r>
-              <a:rPr i="1" lang="en" sz="1000">
-                <a:solidFill>
-                  <a:srgbClr val="6B7573"/>
+              <a:rPr i="1" lang="en" sz="1000" b="1">
+                <a:solidFill>
+                  <a:srgbClr val="141414"/>
                 </a:solidFill>
                 <a:latin typeface="Nunito"/>
                 <a:ea typeface="Nunito"/>
@@ -10611,9 +10676,9 @@
               <a:buNone/>
             </a:pPr>
             <a:r>
-              <a:rPr i="1" lang="en" sz="1000">
-                <a:solidFill>
-                  <a:srgbClr val="6B7573"/>
+              <a:rPr i="1" lang="en" sz="1000" b="1">
+                <a:solidFill>
+                  <a:srgbClr val="141414"/>
                 </a:solidFill>
                 <a:latin typeface="Nunito"/>
                 <a:ea typeface="Nunito"/>
@@ -10651,9 +10716,9 @@
               <a:buNone/>
             </a:pPr>
             <a:r>
-              <a:rPr i="1" lang="en" sz="1000">
-                <a:solidFill>
-                  <a:srgbClr val="6B7573"/>
+              <a:rPr i="1" lang="en" sz="1000" b="1">
+                <a:solidFill>
+                  <a:srgbClr val="141414"/>
                 </a:solidFill>
                 <a:latin typeface="Nunito"/>
                 <a:ea typeface="Nunito"/>
@@ -10719,6 +10784,11 @@
               <a:buNone/>
             </a:pPr>
             <a:r>
+              <a:rPr b="1">
+                <a:solidFill>
+                  <a:srgbClr val="141414"/>
+                </a:solidFill>
+              </a:rPr>
               <a:t/>
             </a:r>
             <a:endParaRPr/>
@@ -10768,16 +10838,16 @@
               <a:buNone/>
             </a:pPr>
             <a:r>
-              <a:rPr i="1" lang="en" sz="1000">
-                <a:solidFill>
-                  <a:srgbClr val="6B7573"/>
+              <a:rPr i="1" lang="en" sz="1000" b="1">
+                <a:solidFill>
+                  <a:srgbClr val="141414"/>
                 </a:solidFill>
                 <a:latin typeface="Nunito"/>
                 <a:ea typeface="Nunito"/>
                 <a:cs typeface="Nunito"/>
                 <a:sym typeface="Nunito"/>
               </a:rPr>
-              <a:t>12–24 month projection</a:t>
+              <a:t>12–24 MONTH PROJECTION</a:t>
             </a:r>
             <a:endParaRPr sz="1000">
               <a:solidFill>
@@ -10808,6 +10878,11 @@
               <a:buNone/>
             </a:pPr>
             <a:r>
+              <a:rPr b="1">
+                <a:solidFill>
+                  <a:srgbClr val="141414"/>
+                </a:solidFill>
+              </a:rPr>
               <a:t>Shop partners onboarded (model): 24 → 40 → 65 → 90 → 120 → 160 → 210 → 270 over 8 quarters.</a:t>
             </a:r>
             <a:endParaRPr sz="1000">
@@ -10839,9 +10914,9 @@
               <a:buNone/>
             </a:pPr>
             <a:r>
-              <a:rPr i="1" lang="en" sz="1000">
-                <a:solidFill>
-                  <a:srgbClr val="6B7573"/>
+              <a:rPr i="1" lang="en" sz="1000" b="1">
+                <a:solidFill>
+                  <a:srgbClr val="141414"/>
                 </a:solidFill>
                 <a:latin typeface="Nunito"/>
                 <a:ea typeface="Nunito"/>
@@ -10879,9 +10954,9 @@
               <a:buNone/>
             </a:pPr>
             <a:r>
-              <a:rPr i="1" lang="en" sz="1000">
-                <a:solidFill>
-                  <a:srgbClr val="6B7573"/>
+              <a:rPr i="1" lang="en" sz="1000" b="1">
+                <a:solidFill>
+                  <a:srgbClr val="141414"/>
                 </a:solidFill>
                 <a:latin typeface="Nunito"/>
                 <a:ea typeface="Nunito"/>
@@ -10919,9 +10994,49 @@
               <a:buNone/>
             </a:pPr>
             <a:r>
-              <a:rPr i="1" lang="en" sz="1000">
-                <a:solidFill>
-                  <a:srgbClr val="6B7573"/>
+              <a:rPr i="1" lang="en" sz="1000" b="1">
+                <a:solidFill>
+                  <a:srgbClr val="141414"/>
+                </a:solidFill>
+                <a:latin typeface="Nunito"/>
+                <a:ea typeface="Nunito"/>
+                <a:cs typeface="Nunito"/>
+                <a:sym typeface="Nunito"/>
+              </a:rPr>
+              <a:t>Ask and growth curve are founder-proposed for the pilot — not achieved figures.</a:t>
+            </a:r>
+            <a:endParaRPr sz="1000">
+              <a:solidFill>
+                <a:schemeClr val="dk1"/>
+              </a:solidFill>
+              <a:latin typeface="Nunito"/>
+              <a:ea typeface="Nunito"/>
+              <a:cs typeface="Nunito"/>
+              <a:sym typeface="Nunito"/>
+            </a:endParaRPr>
+          </a:p>
+          <a:p>
+            <a:pPr indent="0" lvl="0" marL="0" marR="0" rtl="0" algn="l">
+              <a:lnSpc>
+                <a:spcPct val="125000"/>
+              </a:lnSpc>
+              <a:spcBef>
+                <a:spcPts val="0"/>
+              </a:spcBef>
+              <a:spcAft>
+                <a:spcPts val="0"/>
+              </a:spcAft>
+              <a:buClr>
+                <a:srgbClr val="6B7573"/>
+              </a:buClr>
+              <a:buSzPts val="1000"/>
+              <a:buFont typeface="Arial"/>
+              <a:buNone/>
+            </a:pPr>
+            <a:r>
+              <a:rPr i="1" lang="en" sz="1000" b="1">
+                <a:solidFill>
+                  <a:srgbClr val="141414"/>
                 </a:solidFill>
                 <a:latin typeface="Nunito"/>
                 <a:ea typeface="Nunito"/>
@@ -10959,49 +11074,9 @@
               <a:buNone/>
             </a:pPr>
             <a:r>
-              <a:rPr i="1" lang="en" sz="1000">
-                <a:solidFill>
-                  <a:srgbClr val="6B7573"/>
-                </a:solidFill>
-                <a:latin typeface="Nunito"/>
-                <a:ea typeface="Nunito"/>
-                <a:cs typeface="Nunito"/>
-                <a:sym typeface="Nunito"/>
-              </a:rPr>
-              <a:t/>
-            </a:r>
-            <a:endParaRPr sz="1000">
-              <a:solidFill>
-                <a:schemeClr val="dk1"/>
-              </a:solidFill>
-              <a:latin typeface="Nunito"/>
-              <a:ea typeface="Nunito"/>
-              <a:cs typeface="Nunito"/>
-              <a:sym typeface="Nunito"/>
-            </a:endParaRPr>
-          </a:p>
-          <a:p>
-            <a:pPr indent="0" lvl="0" marL="0" marR="0" rtl="0" algn="l">
-              <a:lnSpc>
-                <a:spcPct val="125000"/>
-              </a:lnSpc>
-              <a:spcBef>
-                <a:spcPts val="0"/>
-              </a:spcBef>
-              <a:spcAft>
-                <a:spcPts val="0"/>
-              </a:spcAft>
-              <a:buClr>
-                <a:srgbClr val="6B7573"/>
-              </a:buClr>
-              <a:buSzPts val="1000"/>
-              <a:buFont typeface="Arial"/>
-              <a:buNone/>
-            </a:pPr>
-            <a:r>
-              <a:rPr i="1" lang="en" sz="1000">
-                <a:solidFill>
-                  <a:srgbClr val="6B7573"/>
+              <a:rPr i="1" lang="en" sz="1000" b="1">
+                <a:solidFill>
+                  <a:srgbClr val="141414"/>
                 </a:solidFill>
                 <a:latin typeface="Nunito"/>
                 <a:ea typeface="Nunito"/>
@@ -11170,7 +11245,7 @@
             <a:r>
               <a:rPr b="1" lang="en" sz="1700">
                 <a:solidFill>
-                  <a:srgbClr val="028F35"/>
+                  <a:srgbClr val="141414"/>
                 </a:solidFill>
                 <a:latin typeface="Google Sans"/>
                 <a:ea typeface="Google Sans"/>
@@ -11231,9 +11306,9 @@
               <a:buNone/>
             </a:pPr>
             <a:r>
-              <a:rPr b="1" lang="en" sz="800">
-                <a:solidFill>
-                  <a:srgbClr val="6B7573"/>
+              <a:rPr b="1" lang="en" sz="1000">
+                <a:solidFill>
+                  <a:srgbClr val="141414"/>
                 </a:solidFill>
                 <a:latin typeface="Google Sans"/>
                 <a:ea typeface="Google Sans"/>
@@ -11296,7 +11371,7 @@
             <a:r>
               <a:rPr b="1" lang="en" sz="2400">
                 <a:solidFill>
-                  <a:srgbClr val="1F2323"/>
+                  <a:srgbClr val="141414"/>
                 </a:solidFill>
                 <a:latin typeface="Google Sans"/>
                 <a:ea typeface="Google Sans"/>
@@ -11359,14 +11434,14 @@
             <a:r>
               <a:rPr b="1" lang="en" sz="1100">
                 <a:solidFill>
-                  <a:srgbClr val="028F35"/>
+                  <a:srgbClr val="141414"/>
                 </a:solidFill>
                 <a:latin typeface="Nunito"/>
                 <a:ea typeface="Nunito"/>
                 <a:cs typeface="Nunito"/>
                 <a:sym typeface="Nunito"/>
               </a:rPr>
-              <a:t>Kenya’s travel experience is fragmented — and its creative economy is invisible online</a:t>
+              <a:t>Kenya's travel experience is fragmented — and its creative economy is invisible online</a:t>
             </a:r>
             <a:endParaRPr sz="1100">
               <a:solidFill>
@@ -11425,6 +11500,11 @@
               <a:buNone/>
             </a:pPr>
             <a:r>
+              <a:rPr b="1">
+                <a:solidFill>
+                  <a:srgbClr val="141414"/>
+                </a:solidFill>
+              </a:rPr>
               <a:t/>
             </a:r>
             <a:endParaRPr/>
@@ -11474,16 +11554,16 @@
               <a:buNone/>
             </a:pPr>
             <a:r>
-              <a:rPr i="1" lang="en" sz="1000">
-                <a:solidFill>
-                  <a:srgbClr val="6B7573"/>
+              <a:rPr i="1" lang="en" sz="1000" b="1">
+                <a:solidFill>
+                  <a:srgbClr val="141414"/>
                 </a:solidFill>
                 <a:latin typeface="Nunito"/>
                 <a:ea typeface="Nunito"/>
                 <a:cs typeface="Nunito"/>
                 <a:sym typeface="Nunito"/>
               </a:rPr>
-              <a:t>• International arrivals rose 9% YoY to 2.7M in 2025 (5.2M domestic; 7.9M total), yet travelers still stitch together separate tools for parks, stays, crafts and guides — mostly via commission-heavy foreign platforms.</a:t>
+              <a:t>• International arrivals rose 9% year-on-year to 2.7 million in 2025 (from 2.47M in 2024), with 5.2M domestic trips — 7.9M total visitors — yet travelers still stitch together separate tools for parks, stays, curio shopping and guides, mostly through commission-heavy foreign booking platforms.</a:t>
             </a:r>
             <a:endParaRPr sz="1000">
               <a:solidFill>
@@ -11514,7 +11594,12 @@
               <a:buNone/>
             </a:pPr>
             <a:r>
-              <a:t>• Kenya’s informal / Jua Kali and MSE economy contributes an estimated 24–33% of GDP, but most craft artisans lack a verified digital storefront into tourist demand.</a:t>
+              <a:rPr b="1">
+                <a:solidFill>
+                  <a:srgbClr val="141414"/>
+                </a:solidFill>
+              </a:rPr>
+              <a:t>• Kenya's informal / Jua Kali and MSE economy contributes an estimated 24–33% of GDP and the bulk of new jobs, but most craft artisans still lack a verified, direct digital storefront into tourist demand.</a:t>
             </a:r>
             <a:endParaRPr sz="1000">
               <a:solidFill>
@@ -11545,16 +11630,16 @@
               <a:buNone/>
             </a:pPr>
             <a:r>
-              <a:rPr i="1" lang="en" sz="1000">
-                <a:solidFill>
-                  <a:srgbClr val="6B7573"/>
+              <a:rPr i="1" lang="en" sz="1000" b="1">
+                <a:solidFill>
+                  <a:srgbClr val="141414"/>
                 </a:solidFill>
                 <a:latin typeface="Nunito"/>
                 <a:ea typeface="Nunito"/>
                 <a:cs typeface="Nunito"/>
                 <a:sym typeface="Nunito"/>
               </a:rPr>
-              <a:t>• Federation of Kenya Employers cites 67% unemployment among Kenyans aged 15–34 — deep local knowledge sits idle instead of being monetized as guiding.</a:t>
+              <a:t>• Federation of Kenya Employers cites a 67% unemployment rate among Kenyans aged 15–34 — deep local knowledge sits idle instead of being monetized as guiding services.</a:t>
             </a:r>
             <a:endParaRPr sz="1000">
               <a:solidFill>
@@ -11585,6 +11670,11 @@
               <a:buNone/>
             </a:pPr>
             <a:r>
+              <a:rPr b="1">
+                <a:solidFill>
+                  <a:srgbClr val="141414"/>
+                </a:solidFill>
+              </a:rPr>
               <a:t/>
             </a:r>
             <a:endParaRPr sz="1000">
@@ -11616,9 +11706,9 @@
               <a:buNone/>
             </a:pPr>
             <a:r>
-              <a:rPr i="1" lang="en" sz="1000">
-                <a:solidFill>
-                  <a:srgbClr val="6B7573"/>
+              <a:rPr i="1" lang="en" sz="1000" b="1">
+                <a:solidFill>
+                  <a:srgbClr val="141414"/>
                 </a:solidFill>
                 <a:latin typeface="Nunito"/>
                 <a:ea typeface="Nunito"/>
@@ -11656,6 +11746,11 @@
               <a:buNone/>
             </a:pPr>
             <a:r>
+              <a:rPr b="1">
+                <a:solidFill>
+                  <a:srgbClr val="141414"/>
+                </a:solidFill>
+              </a:rPr>
               <a:t/>
             </a:r>
             <a:endParaRPr sz="1000">
@@ -11687,9 +11782,9 @@
               <a:buNone/>
             </a:pPr>
             <a:r>
-              <a:rPr i="1" lang="en" sz="1000">
-                <a:solidFill>
-                  <a:srgbClr val="6B7573"/>
+              <a:rPr i="1" lang="en" sz="1000" b="1">
+                <a:solidFill>
+                  <a:srgbClr val="141414"/>
                 </a:solidFill>
                 <a:latin typeface="Nunito"/>
                 <a:ea typeface="Nunito"/>
@@ -11755,6 +11850,11 @@
               <a:buNone/>
             </a:pPr>
             <a:r>
+              <a:rPr b="1">
+                <a:solidFill>
+                  <a:srgbClr val="141414"/>
+                </a:solidFill>
+              </a:rPr>
               <a:t/>
             </a:r>
             <a:endParaRPr/>
@@ -11804,9 +11904,9 @@
               <a:buNone/>
             </a:pPr>
             <a:r>
-              <a:rPr i="1" lang="en" sz="1000">
-                <a:solidFill>
-                  <a:srgbClr val="6B7573"/>
+              <a:rPr i="1" lang="en" sz="1000" b="1">
+                <a:solidFill>
+                  <a:srgbClr val="141414"/>
                 </a:solidFill>
                 <a:latin typeface="Nunito"/>
                 <a:ea typeface="Nunito"/>
@@ -11844,7 +11944,12 @@
               <a:buNone/>
             </a:pPr>
             <a:r>
-              <a:t>67% — FKE figure for ages 15–34 without adequate employment</a:t>
+              <a:rPr b="1">
+                <a:solidFill>
+                  <a:srgbClr val="141414"/>
+                </a:solidFill>
+              </a:rPr>
+              <a:t>67% — FKE figure for Kenyans aged 15–34 without adequate employment</a:t>
             </a:r>
             <a:endParaRPr sz="1000">
               <a:solidFill>
@@ -11875,16 +11980,16 @@
               <a:buNone/>
             </a:pPr>
             <a:r>
-              <a:rPr i="1" lang="en" sz="1000">
-                <a:solidFill>
-                  <a:srgbClr val="6B7573"/>
+              <a:rPr i="1" lang="en" sz="1000" b="1">
+                <a:solidFill>
+                  <a:srgbClr val="141414"/>
                 </a:solidFill>
                 <a:latin typeface="Nunito"/>
                 <a:ea typeface="Nunito"/>
                 <a:cs typeface="Nunito"/>
                 <a:sym typeface="Nunito"/>
               </a:rPr>
-              <a:t>2.7M international arrivals in 2025 (+9% YoY)</a:t>
+              <a:t>2.7M international arrivals in 2025, up 9% YoY; KES 0.5T tourism earnings</a:t>
             </a:r>
             <a:endParaRPr sz="1000">
               <a:solidFill>
@@ -11915,16 +12020,16 @@
               <a:buNone/>
             </a:pPr>
             <a:r>
-              <a:rPr i="1" lang="en" sz="1000">
-                <a:solidFill>
-                  <a:srgbClr val="6B7573"/>
+              <a:rPr i="1" lang="en" sz="1000" b="1">
+                <a:solidFill>
+                  <a:srgbClr val="141414"/>
                 </a:solidFill>
                 <a:latin typeface="Nunito"/>
                 <a:ea typeface="Nunito"/>
                 <a:cs typeface="Nunito"/>
                 <a:sym typeface="Nunito"/>
               </a:rPr>
-              <a:t>KES ~0.5T (~US$3.8B) tourism earnings (Ministry / Magical Kenya 2025)</a:t>
+              <a:t>Sources: Kenya Ministry of Tourism &amp; Wildlife / Magical Kenya 2025; FKE; FinAccess / Daily Nation on informal GDP share (24–33%).</a:t>
             </a:r>
             <a:endParaRPr sz="1000">
               <a:solidFill>
@@ -11955,9 +12060,9 @@
               <a:buNone/>
             </a:pPr>
             <a:r>
-              <a:rPr i="1" lang="en" sz="1000">
-                <a:solidFill>
-                  <a:srgbClr val="6B7573"/>
+              <a:rPr i="1" lang="en" sz="1000" b="1">
+                <a:solidFill>
+                  <a:srgbClr val="141414"/>
                 </a:solidFill>
                 <a:latin typeface="Nunito"/>
                 <a:ea typeface="Nunito"/>
@@ -12126,7 +12231,7 @@
             <a:r>
               <a:rPr b="1" lang="en" sz="1700">
                 <a:solidFill>
-                  <a:srgbClr val="028F35"/>
+                  <a:srgbClr val="141414"/>
                 </a:solidFill>
                 <a:latin typeface="Google Sans"/>
                 <a:ea typeface="Google Sans"/>
@@ -12187,9 +12292,9 @@
               <a:buNone/>
             </a:pPr>
             <a:r>
-              <a:rPr b="1" lang="en" sz="800">
-                <a:solidFill>
-                  <a:srgbClr val="6B7573"/>
+              <a:rPr b="1" lang="en" sz="1000">
+                <a:solidFill>
+                  <a:srgbClr val="141414"/>
                 </a:solidFill>
                 <a:latin typeface="Google Sans"/>
                 <a:ea typeface="Google Sans"/>
@@ -12252,7 +12357,7 @@
             <a:r>
               <a:rPr b="1" lang="en" sz="2400">
                 <a:solidFill>
-                  <a:srgbClr val="1F2323"/>
+                  <a:srgbClr val="141414"/>
                 </a:solidFill>
                 <a:latin typeface="Google Sans"/>
                 <a:ea typeface="Google Sans"/>
@@ -12315,14 +12420,14 @@
             <a:r>
               <a:rPr b="1" lang="en" sz="1100">
                 <a:solidFill>
-                  <a:srgbClr val="028F35"/>
+                  <a:srgbClr val="141414"/>
                 </a:solidFill>
                 <a:latin typeface="Google Sans"/>
                 <a:ea typeface="Google Sans"/>
                 <a:cs typeface="Google Sans"/>
                 <a:sym typeface="Google Sans"/>
               </a:rPr>
-              <a:t>One app: parks, stays, verified Kenyan crafts and student guides — paid by M-Pesa</a:t>
+              <a:t>One app: parks, stays, verified crafts and student guides — native to Kenya</a:t>
             </a:r>
             <a:endParaRPr sz="1100">
               <a:solidFill>
@@ -12375,6 +12480,11 @@
               <a:buNone/>
             </a:pPr>
             <a:r>
+              <a:rPr b="1">
+                <a:solidFill>
+                  <a:srgbClr val="141414"/>
+                </a:solidFill>
+              </a:rPr>
               <a:t/>
             </a:r>
             <a:endParaRPr/>
@@ -12423,7 +12533,7 @@
             <a:r>
               <a:rPr b="1" lang="en" sz="1100">
                 <a:solidFill>
-                  <a:srgbClr val="FFFFFF"/>
+                  <a:srgbClr val="141414"/>
                 </a:solidFill>
                 <a:latin typeface="Nunito"/>
                 <a:ea typeface="Nunito"/>
@@ -12489,6 +12599,11 @@
               <a:buNone/>
             </a:pPr>
             <a:r>
+              <a:rPr b="1">
+                <a:solidFill>
+                  <a:srgbClr val="141414"/>
+                </a:solidFill>
+              </a:rPr>
               <a:t/>
             </a:r>
             <a:endParaRPr/>
@@ -12538,16 +12653,16 @@
               <a:buNone/>
             </a:pPr>
             <a:r>
-              <a:rPr i="1" lang="en" sz="900">
-                <a:solidFill>
-                  <a:srgbClr val="6B7573"/>
+              <a:rPr i="1" lang="en" sz="900" b="1">
+                <a:solidFill>
+                  <a:srgbClr val="141414"/>
                 </a:solidFill>
                 <a:latin typeface="Nunito"/>
                 <a:ea typeface="Nunito"/>
                 <a:cs typeface="Nunito"/>
                 <a:sym typeface="Nunito"/>
               </a:rPr>
-              <a:t>A single web experience from discovering Kenya’s parks to buying a named artisan craft and pairing with a vetted university guide — checked out with native M-Pesa STK Push.</a:t>
+              <a:t>A single web experience from discovering Kenya's parks to buying a named artisan craft and pairing with a vetted university guide — checked out with native M-Pesa STK Push.</a:t>
             </a:r>
             <a:endParaRPr sz="900">
               <a:solidFill>
@@ -12600,6 +12715,11 @@
               <a:buNone/>
             </a:pPr>
             <a:r>
+              <a:rPr b="1">
+                <a:solidFill>
+                  <a:srgbClr val="141414"/>
+                </a:solidFill>
+              </a:rPr>
               <a:t/>
             </a:r>
             <a:endParaRPr/>
@@ -12648,7 +12768,7 @@
             <a:r>
               <a:rPr b="1" lang="en" sz="1100">
                 <a:solidFill>
-                  <a:srgbClr val="FFFFFF"/>
+                  <a:srgbClr val="141414"/>
                 </a:solidFill>
                 <a:latin typeface="Nunito"/>
                 <a:ea typeface="Nunito"/>
@@ -12714,6 +12834,11 @@
               <a:buNone/>
             </a:pPr>
             <a:r>
+              <a:rPr b="1">
+                <a:solidFill>
+                  <a:srgbClr val="141414"/>
+                </a:solidFill>
+              </a:rPr>
               <a:t/>
             </a:r>
             <a:endParaRPr/>
@@ -12763,16 +12888,16 @@
               <a:buNone/>
             </a:pPr>
             <a:r>
-              <a:rPr i="1" lang="en" sz="900">
-                <a:solidFill>
-                  <a:srgbClr val="6B7573"/>
+              <a:rPr i="1" lang="en" sz="900" b="1">
+                <a:solidFill>
+                  <a:srgbClr val="141414"/>
                 </a:solidFill>
                 <a:latin typeface="Nunito"/>
                 <a:ea typeface="Nunito"/>
                 <a:cs typeface="Nunito"/>
                 <a:sym typeface="Nunito"/>
               </a:rPr>
-              <a:t>Interactive map (15 parks) → travel &amp; stay booking → marketplace of 28 crafts tied to real shops and Google Maps pins → on-demand pairing with guides from 12 Kenyan universities.</a:t>
+              <a:t>Interactive map across 15 parks → unified travel &amp; stay booking → curated marketplace of 28 crafts tied to real shops and Google Maps pins → on-demand pairing with vetted university student guides.</a:t>
             </a:r>
             <a:endParaRPr sz="900">
               <a:solidFill>
@@ -12825,6 +12950,11 @@
               <a:buNone/>
             </a:pPr>
             <a:r>
+              <a:rPr b="1">
+                <a:solidFill>
+                  <a:srgbClr val="141414"/>
+                </a:solidFill>
+              </a:rPr>
               <a:t/>
             </a:r>
             <a:endParaRPr/>
@@ -12873,7 +13003,7 @@
             <a:r>
               <a:rPr b="1" lang="en" sz="1100">
                 <a:solidFill>
-                  <a:srgbClr val="FFFFFF"/>
+                  <a:srgbClr val="141414"/>
                 </a:solidFill>
                 <a:latin typeface="Nunito"/>
                 <a:ea typeface="Nunito"/>
@@ -12939,6 +13069,11 @@
               <a:buNone/>
             </a:pPr>
             <a:r>
+              <a:rPr b="1">
+                <a:solidFill>
+                  <a:srgbClr val="141414"/>
+                </a:solidFill>
+              </a:rPr>
               <a:t/>
             </a:r>
             <a:endParaRPr>
@@ -12993,16 +13128,16 @@
               <a:buNone/>
             </a:pPr>
             <a:r>
-              <a:rPr i="1" lang="en" sz="900">
-                <a:solidFill>
-                  <a:srgbClr val="6B7573"/>
+              <a:rPr i="1" lang="en" sz="900" b="1">
+                <a:solidFill>
+                  <a:srgbClr val="141414"/>
                 </a:solidFill>
                 <a:latin typeface="Nunito"/>
                 <a:ea typeface="Nunito"/>
                 <a:cs typeface="Nunito"/>
                 <a:sym typeface="Nunito"/>
               </a:rPr>
-              <a:t>Built on Kenya’s own payment rail (~98% of mobile subscriptions use mobile money, CA Kenya) instead of card-only global OTAs; every shop and guide is named and mappable; guiding fees go to Kenyan students.</a:t>
+              <a:t>Built on Kenya's own payment rail (mobile money used by ~98% of mobile subscriptions, CA Kenya Dec 2025) instead of card-only global platforms; every shop and guide is named and mappable; guiding fees go to Kenyan students.</a:t>
             </a:r>
             <a:endParaRPr sz="900">
               <a:solidFill>
@@ -13164,7 +13299,7 @@
             <a:r>
               <a:rPr b="1" lang="en" sz="1700">
                 <a:solidFill>
-                  <a:srgbClr val="028F35"/>
+                  <a:srgbClr val="141414"/>
                 </a:solidFill>
                 <a:latin typeface="Google Sans"/>
                 <a:ea typeface="Google Sans"/>
@@ -13225,9 +13360,9 @@
               <a:buNone/>
             </a:pPr>
             <a:r>
-              <a:rPr b="1" lang="en" sz="800">
-                <a:solidFill>
-                  <a:srgbClr val="6B7573"/>
+              <a:rPr b="1" lang="en" sz="1000">
+                <a:solidFill>
+                  <a:srgbClr val="141414"/>
                 </a:solidFill>
                 <a:latin typeface="Google Sans"/>
                 <a:ea typeface="Google Sans"/>
@@ -13290,7 +13425,7 @@
             <a:r>
               <a:rPr b="1" lang="en" sz="2400">
                 <a:solidFill>
-                  <a:srgbClr val="1F2323"/>
+                  <a:srgbClr val="141414"/>
                 </a:solidFill>
                 <a:latin typeface="Google Sans"/>
                 <a:ea typeface="Google Sans"/>
@@ -13353,14 +13488,14 @@
             <a:r>
               <a:rPr b="1" lang="en" sz="1100">
                 <a:solidFill>
-                  <a:srgbClr val="028F35"/>
+                  <a:srgbClr val="141414"/>
                 </a:solidFill>
                 <a:latin typeface="Nunito"/>
                 <a:ea typeface="Nunito"/>
                 <a:cs typeface="Nunito"/>
                 <a:sym typeface="Nunito"/>
               </a:rPr>
-              <a:t>Four steps, one continuous journey — live build today</a:t>
+              <a:t>Four steps, one continuous journey</a:t>
             </a:r>
             <a:endParaRPr sz="1100">
               <a:solidFill>
@@ -13419,6 +13554,11 @@
               <a:buNone/>
             </a:pPr>
             <a:r>
+              <a:rPr b="1">
+                <a:solidFill>
+                  <a:srgbClr val="141414"/>
+                </a:solidFill>
+              </a:rPr>
               <a:t/>
             </a:r>
             <a:endParaRPr/>
@@ -13468,16 +13608,16 @@
               <a:buNone/>
             </a:pPr>
             <a:r>
-              <a:rPr i="1" lang="en" sz="1000">
-                <a:solidFill>
-                  <a:srgbClr val="6B7573"/>
+              <a:rPr i="1" lang="en" sz="1000" b="1">
+                <a:solidFill>
+                  <a:srgbClr val="141414"/>
                 </a:solidFill>
                 <a:latin typeface="Nunito"/>
                 <a:ea typeface="Nunito"/>
                 <a:cs typeface="Nunito"/>
                 <a:sym typeface="Nunito"/>
               </a:rPr>
-              <a:t>Interactive map, integrated booking, working M-Pesa checkout, and a guide roster — with Kenyan craft and place photography throughout Artifacts and Guides.</a:t>
+              <a:t>The live build today: an interactive map, integrated booking, a working M-Pesa checkout, and a guide roster — with Kenyan craft &amp; place photography throughout.</a:t>
             </a:r>
             <a:endParaRPr sz="1000">
               <a:solidFill>
@@ -13536,6 +13676,11 @@
               <a:buNone/>
             </a:pPr>
             <a:r>
+              <a:rPr b="1">
+                <a:solidFill>
+                  <a:srgbClr val="141414"/>
+                </a:solidFill>
+              </a:rPr>
               <a:t/>
             </a:r>
             <a:endParaRPr/>
@@ -13584,7 +13729,7 @@
             <a:r>
               <a:rPr b="1" lang="en" sz="1000">
                 <a:solidFill>
-                  <a:srgbClr val="1F2323"/>
+                  <a:srgbClr val="141414"/>
                 </a:solidFill>
                 <a:latin typeface="Nunito"/>
                 <a:ea typeface="Nunito"/>
@@ -13645,16 +13790,16 @@
               <a:buNone/>
             </a:pPr>
             <a:r>
-              <a:rPr i="1" lang="en" sz="800">
-                <a:solidFill>
-                  <a:srgbClr val="6B7573"/>
+              <a:rPr i="1" lang="en" sz="1000" b="1">
+                <a:solidFill>
+                  <a:srgbClr val="141414"/>
                 </a:solidFill>
                 <a:latin typeface="Nunito"/>
                 <a:ea typeface="Nunito"/>
                 <a:cs typeface="Nunito"/>
                 <a:sym typeface="Nunito"/>
               </a:rPr>
-              <a:t>Browse 15 parks &amp; destinations on a live interactive map</a:t>
+              <a:t>Browse 15 national parks &amp; destinations across Kenya and Africa on a live interactive map, with search and weather.</a:t>
             </a:r>
             <a:endParaRPr sz="800">
               <a:solidFill>
@@ -13710,7 +13855,7 @@
             <a:r>
               <a:rPr b="1" lang="en" sz="1500">
                 <a:solidFill>
-                  <a:srgbClr val="6B7573"/>
+                  <a:srgbClr val="141414"/>
                 </a:solidFill>
                 <a:latin typeface="Calibri"/>
                 <a:ea typeface="Calibri"/>
@@ -13776,6 +13921,11 @@
               <a:buNone/>
             </a:pPr>
             <a:r>
+              <a:rPr b="1">
+                <a:solidFill>
+                  <a:srgbClr val="141414"/>
+                </a:solidFill>
+              </a:rPr>
               <a:t/>
             </a:r>
             <a:endParaRPr/>
@@ -13824,7 +13974,7 @@
             <a:r>
               <a:rPr b="1" lang="en" sz="1000">
                 <a:solidFill>
-                  <a:srgbClr val="1F2323"/>
+                  <a:srgbClr val="141414"/>
                 </a:solidFill>
                 <a:latin typeface="Nunito"/>
                 <a:ea typeface="Nunito"/>
@@ -13885,16 +14035,16 @@
               <a:buNone/>
             </a:pPr>
             <a:r>
-              <a:rPr i="1" lang="en" sz="800">
-                <a:solidFill>
-                  <a:srgbClr val="6B7573"/>
+              <a:rPr i="1" lang="en" sz="1000" b="1">
+                <a:solidFill>
+                  <a:srgbClr val="141414"/>
                 </a:solidFill>
                 <a:latin typeface="Nunito"/>
                 <a:ea typeface="Nunito"/>
                 <a:cs typeface="Nunito"/>
                 <a:sym typeface="Nunito"/>
               </a:rPr>
-              <a:t>Book travel and accommodation in the same flow</a:t>
+              <a:t>Book travel and accommodation in the same flow — no separate app or tab.</a:t>
             </a:r>
             <a:endParaRPr sz="800">
               <a:solidFill>
@@ -13950,7 +14100,7 @@
             <a:r>
               <a:rPr b="1" lang="en" sz="1500">
                 <a:solidFill>
-                  <a:srgbClr val="6B7573"/>
+                  <a:srgbClr val="141414"/>
                 </a:solidFill>
                 <a:latin typeface="Calibri"/>
                 <a:ea typeface="Calibri"/>
@@ -14016,6 +14166,11 @@
               <a:buNone/>
             </a:pPr>
             <a:r>
+              <a:rPr b="1">
+                <a:solidFill>
+                  <a:srgbClr val="141414"/>
+                </a:solidFill>
+              </a:rPr>
               <a:t/>
             </a:r>
             <a:endParaRPr/>
@@ -14064,7 +14219,7 @@
             <a:r>
               <a:rPr b="1" lang="en" sz="1000">
                 <a:solidFill>
-                  <a:srgbClr val="1F2323"/>
+                  <a:srgbClr val="141414"/>
                 </a:solidFill>
                 <a:latin typeface="Nunito"/>
                 <a:ea typeface="Nunito"/>
@@ -14125,16 +14280,16 @@
               <a:buNone/>
             </a:pPr>
             <a:r>
-              <a:rPr i="1" lang="en" sz="800">
-                <a:solidFill>
-                  <a:srgbClr val="6B7573"/>
+              <a:rPr i="1" lang="en" sz="1000" b="1">
+                <a:solidFill>
+                  <a:srgbClr val="141414"/>
                 </a:solidFill>
                 <a:latin typeface="Nunito"/>
                 <a:ea typeface="Nunito"/>
                 <a:cs typeface="Nunito"/>
                 <a:sym typeface="Nunito"/>
               </a:rPr>
-              <a:t>Buy authentic crafts from named Kenyan shops (Tabaka, Kazuri, Maasai Market)</a:t>
+              <a:t>Buy an authentic craft from a named shop, e.g. Tabaka Soapstone Cooperative in Kisii, mapped on Google Maps.</a:t>
             </a:r>
             <a:endParaRPr sz="800">
               <a:solidFill>
@@ -14190,7 +14345,7 @@
             <a:r>
               <a:rPr b="1" lang="en" sz="1500">
                 <a:solidFill>
-                  <a:srgbClr val="6B7573"/>
+                  <a:srgbClr val="141414"/>
                 </a:solidFill>
                 <a:latin typeface="Calibri"/>
                 <a:ea typeface="Calibri"/>
@@ -14256,6 +14411,11 @@
               <a:buNone/>
             </a:pPr>
             <a:r>
+              <a:rPr b="1">
+                <a:solidFill>
+                  <a:srgbClr val="141414"/>
+                </a:solidFill>
+              </a:rPr>
               <a:t/>
             </a:r>
             <a:endParaRPr/>
@@ -14304,7 +14464,7 @@
             <a:r>
               <a:rPr b="1" lang="en" sz="1000">
                 <a:solidFill>
-                  <a:srgbClr val="1F2323"/>
+                  <a:srgbClr val="141414"/>
                 </a:solidFill>
                 <a:latin typeface="Nunito"/>
                 <a:ea typeface="Nunito"/>
@@ -14365,16 +14525,16 @@
               <a:buNone/>
             </a:pPr>
             <a:r>
-              <a:rPr i="1" lang="en" sz="800">
-                <a:solidFill>
-                  <a:srgbClr val="6B7573"/>
+              <a:rPr i="1" lang="en" sz="1000" b="1">
+                <a:solidFill>
+                  <a:srgbClr val="141414"/>
                 </a:solidFill>
                 <a:latin typeface="Nunito"/>
                 <a:ea typeface="Nunito"/>
                 <a:cs typeface="Nunito"/>
                 <a:sym typeface="Nunito"/>
               </a:rPr>
-              <a:t>Pay by M-Pesa STK Push, then pair with a vetted student guide</a:t>
+              <a:t>Pay instantly by M-Pesa STK Push, then pair with a vetted student guide from one of 12 Kenyan universities.</a:t>
             </a:r>
             <a:endParaRPr sz="800">
               <a:solidFill>
@@ -14509,7 +14669,7 @@
             <a:r>
               <a:rPr b="1" lang="en" sz="1700">
                 <a:solidFill>
-                  <a:srgbClr val="028F35"/>
+                  <a:srgbClr val="141414"/>
                 </a:solidFill>
                 <a:latin typeface="Google Sans"/>
                 <a:ea typeface="Google Sans"/>
@@ -14570,9 +14730,9 @@
               <a:buNone/>
             </a:pPr>
             <a:r>
-              <a:rPr b="1" lang="en" sz="800">
-                <a:solidFill>
-                  <a:srgbClr val="6B7573"/>
+              <a:rPr b="1" lang="en" sz="1000">
+                <a:solidFill>
+                  <a:srgbClr val="141414"/>
                 </a:solidFill>
                 <a:latin typeface="Google Sans"/>
                 <a:ea typeface="Google Sans"/>
@@ -14635,7 +14795,7 @@
             <a:r>
               <a:rPr b="1" lang="en" sz="2400">
                 <a:solidFill>
-                  <a:srgbClr val="1F2323"/>
+                  <a:srgbClr val="141414"/>
                 </a:solidFill>
                 <a:latin typeface="Google Sans"/>
                 <a:ea typeface="Google Sans"/>
@@ -14698,7 +14858,7 @@
             <a:r>
               <a:rPr b="1" lang="en" sz="1100">
                 <a:solidFill>
-                  <a:srgbClr val="028F35"/>
+                  <a:srgbClr val="141414"/>
                 </a:solidFill>
                 <a:latin typeface="Google Sans"/>
                 <a:ea typeface="Google Sans"/>
@@ -14759,16 +14919,16 @@
               <a:buNone/>
             </a:pPr>
             <a:r>
-              <a:rPr i="1" lang="en" sz="900">
-                <a:solidFill>
-                  <a:srgbClr val="6B7573"/>
+              <a:rPr i="1" lang="en" sz="900" b="1">
+                <a:solidFill>
+                  <a:srgbClr val="141414"/>
                 </a:solidFill>
                 <a:latin typeface="Nunito"/>
                 <a:ea typeface="Nunito"/>
                 <a:cs typeface="Nunito"/>
                 <a:sym typeface="Nunito"/>
               </a:rPr>
-              <a:t>TAM US$12.7B  ·  SAM ~US$3.8B  ·  SOM US$45M GMV (3-yr model)</a:t>
+              <a:t>TAM — US$12.7B   ·   SAM — ~US$3.8B (KES 0.5T)   ·   SOM (3-yr, modeled) — US$45M GMV</a:t>
             </a:r>
             <a:endParaRPr sz="900">
               <a:solidFill>
@@ -14854,6 +15014,11 @@
               <a:buNone/>
             </a:pPr>
             <a:r>
+              <a:rPr b="1">
+                <a:solidFill>
+                  <a:srgbClr val="141414"/>
+                </a:solidFill>
+              </a:rPr>
               <a:t/>
             </a:r>
             <a:endParaRPr/>
@@ -14903,16 +15068,16 @@
               <a:buNone/>
             </a:pPr>
             <a:r>
-              <a:rPr i="1" lang="en" sz="900">
-                <a:solidFill>
-                  <a:srgbClr val="6B7573"/>
+              <a:rPr i="1" lang="en" sz="900" b="1">
+                <a:solidFill>
+                  <a:srgbClr val="141414"/>
                 </a:solidFill>
                 <a:latin typeface="Nunito"/>
                 <a:ea typeface="Nunito"/>
                 <a:cs typeface="Nunito"/>
                 <a:sym typeface="Nunito"/>
               </a:rPr>
-              <a:t>• TAM — US$12.7B: WTTC Travel &amp; Tourism contribution to Kenya in 2025 (9.3% of GDP; 1.8M jobs).</a:t>
+              <a:t>• TAM — US$12.7B: WTTC reports Travel &amp; Tourism contributed US$12.7 billion to Kenya's economy in 2025 (9.3% of GDP) and supported 1.8 million jobs (8.3% of employment). Source: WTTC Economic Impact Research 2025/26.</a:t>
             </a:r>
             <a:endParaRPr sz="900">
               <a:solidFill>
@@ -14943,7 +15108,12 @@
               <a:buNone/>
             </a:pPr>
             <a:r>
-              <a:t>• SAM — ~US$3.8B (KES 0.5T): Ministry-reported direct tourism earnings from 7.9M visitors (2.7M international + 5.2M domestic).</a:t>
+              <a:rPr b="1">
+                <a:solidFill>
+                  <a:srgbClr val="141414"/>
+                </a:solidFill>
+              </a:rPr>
+              <a:t>• SAM — ~US$3.8B (KES 0.5T): Government-reported direct tourism earnings from 7.9M visitors in 2025 (2.7M international + 5.2M domestic). Digitally reachable craft, guiding and local-booking spend sits inside this earnings base. Source: Kenya Ministry of Tourism &amp; Wildlife / Magical Kenya 2025.</a:t>
             </a:r>
             <a:endParaRPr sz="900">
               <a:solidFill>
@@ -14974,16 +15144,16 @@
               <a:buNone/>
             </a:pPr>
             <a:r>
-              <a:rPr i="1" lang="en" sz="900">
-                <a:solidFill>
-                  <a:srgbClr val="6B7573"/>
+              <a:rPr i="1" lang="en" sz="900" b="1">
+                <a:solidFill>
+                  <a:srgbClr val="141414"/>
                 </a:solidFill>
                 <a:latin typeface="Nunito"/>
                 <a:ea typeface="Nunito"/>
                 <a:cs typeface="Nunito"/>
                 <a:sym typeface="Nunito"/>
               </a:rPr>
-              <a:t>• SOM (3-yr, modeled) — US$45M GMV: illustrative ~1.2% capture of international visitor spend on crafts / experiences / guiding (~US$5.0B international spend, WTTC).</a:t>
+              <a:t>• SOM (3-yr, modeled) — US$45M GMV: Illustrative ~1.2% of international visitor spend on crafts/experiences/guiding (~US$5.0B international spend per WTTC) flowing through Aurora by year 3 — a model to validate in the Nairobi + Maasai Mara pilot, not an achieved figure.</a:t>
             </a:r>
             <a:endParaRPr sz="900">
               <a:solidFill>
@@ -15014,7 +15184,12 @@
               <a:buNone/>
             </a:pPr>
             <a:r>
-              <a:t>• Sources: WTTC EIR 2025/26; Kenya Ministry of Tourism &amp; Wildlife / Magical Kenya 2025.</a:t>
+              <a:rPr b="1">
+                <a:solidFill>
+                  <a:srgbClr val="141414"/>
+                </a:solidFill>
+              </a:rPr>
+              <a:t/>
             </a:r>
             <a:endParaRPr sz="900">
               <a:solidFill>
@@ -15045,9 +15220,9 @@
               <a:buNone/>
             </a:pPr>
             <a:r>
-              <a:rPr i="1" lang="en" sz="900">
-                <a:solidFill>
-                  <a:srgbClr val="6B7573"/>
+              <a:rPr i="1" lang="en" sz="900" b="1">
+                <a:solidFill>
+                  <a:srgbClr val="141414"/>
                 </a:solidFill>
                 <a:latin typeface="Nunito"/>
                 <a:ea typeface="Nunito"/>
@@ -15085,6 +15260,11 @@
               <a:buNone/>
             </a:pPr>
             <a:r>
+              <a:rPr b="1">
+                <a:solidFill>
+                  <a:srgbClr val="141414"/>
+                </a:solidFill>
+              </a:rPr>
               <a:t/>
             </a:r>
             <a:endParaRPr sz="900">
@@ -15116,9 +15296,9 @@
               <a:buNone/>
             </a:pPr>
             <a:r>
-              <a:rPr i="1" lang="en" sz="900">
-                <a:solidFill>
-                  <a:srgbClr val="6B7573"/>
+              <a:rPr i="1" lang="en" sz="900" b="1">
+                <a:solidFill>
+                  <a:srgbClr val="141414"/>
                 </a:solidFill>
                 <a:latin typeface="Nunito"/>
                 <a:ea typeface="Nunito"/>
@@ -15287,7 +15467,7 @@
             <a:r>
               <a:rPr b="1" lang="en" sz="1700">
                 <a:solidFill>
-                  <a:srgbClr val="028F35"/>
+                  <a:srgbClr val="141414"/>
                 </a:solidFill>
                 <a:latin typeface="Google Sans"/>
                 <a:ea typeface="Google Sans"/>
@@ -15348,9 +15528,9 @@
               <a:buNone/>
             </a:pPr>
             <a:r>
-              <a:rPr b="1" lang="en" sz="800">
-                <a:solidFill>
-                  <a:srgbClr val="6B7573"/>
+              <a:rPr b="1" lang="en" sz="1000">
+                <a:solidFill>
+                  <a:srgbClr val="141414"/>
                 </a:solidFill>
                 <a:latin typeface="Google Sans"/>
                 <a:ea typeface="Google Sans"/>
@@ -15413,7 +15593,7 @@
             <a:r>
               <a:rPr b="1" lang="en" sz="2400">
                 <a:solidFill>
-                  <a:srgbClr val="1F2323"/>
+                  <a:srgbClr val="141414"/>
                 </a:solidFill>
                 <a:latin typeface="Google Sans"/>
                 <a:ea typeface="Google Sans"/>
@@ -15476,14 +15656,14 @@
             <a:r>
               <a:rPr b="1" lang="en" sz="1100">
                 <a:solidFill>
-                  <a:srgbClr val="028F35"/>
+                  <a:srgbClr val="141414"/>
                 </a:solidFill>
                 <a:latin typeface="Nunito"/>
                 <a:ea typeface="Nunito"/>
                 <a:cs typeface="Nunito"/>
                 <a:sym typeface="Nunito"/>
               </a:rPr>
-              <a:t>How do you make money?</a:t>
+              <a:t>How Aurora Travels makes money</a:t>
             </a:r>
             <a:endParaRPr sz="1100">
               <a:solidFill>
@@ -15536,6 +15716,11 @@
               <a:buNone/>
             </a:pPr>
             <a:r>
+              <a:rPr b="1">
+                <a:solidFill>
+                  <a:srgbClr val="141414"/>
+                </a:solidFill>
+              </a:rPr>
               <a:t/>
             </a:r>
             <a:endParaRPr/>
@@ -15584,7 +15769,7 @@
             <a:r>
               <a:rPr b="1" lang="en" sz="1100">
                 <a:solidFill>
-                  <a:srgbClr val="FFFFFF"/>
+                  <a:srgbClr val="141414"/>
                 </a:solidFill>
                 <a:latin typeface="Nunito"/>
                 <a:ea typeface="Nunito"/>
@@ -15650,6 +15835,11 @@
               <a:buNone/>
             </a:pPr>
             <a:r>
+              <a:rPr b="1">
+                <a:solidFill>
+                  <a:srgbClr val="141414"/>
+                </a:solidFill>
+              </a:rPr>
               <a:t/>
             </a:r>
             <a:endParaRPr/>
@@ -15699,16 +15889,16 @@
               <a:buNone/>
             </a:pPr>
             <a:r>
-              <a:rPr i="1" lang="en" sz="900">
-                <a:solidFill>
-                  <a:srgbClr val="6B7573"/>
+              <a:rPr i="1" lang="en" sz="900" b="1">
+                <a:solidFill>
+                  <a:srgbClr val="141414"/>
                 </a:solidFill>
                 <a:latin typeface="Nunito"/>
                 <a:ea typeface="Nunito"/>
                 <a:cs typeface="Nunito"/>
                 <a:sym typeface="Nunito"/>
               </a:rPr>
-              <a:t>Craft GMV take-rate (~12%); guide-booking service fee (KES 500–800); 8–10% referral on travel &amp; stay; featured placement for shops (KES 3,000–8,000/mo) and guides.</a:t>
+              <a:t>12% average take-rate on craft GMV (below typical OTA bands); KES 500–800 guide-booking service fee per pairing; 8–10% referral commission on travel &amp; stay bookings; featured-placement fees for shops (KES 3,000–8,000/mo) and guides.</a:t>
             </a:r>
             <a:endParaRPr sz="900">
               <a:solidFill>
@@ -15761,6 +15951,11 @@
               <a:buNone/>
             </a:pPr>
             <a:r>
+              <a:rPr b="1">
+                <a:solidFill>
+                  <a:srgbClr val="141414"/>
+                </a:solidFill>
+              </a:rPr>
               <a:t/>
             </a:r>
             <a:endParaRPr/>
@@ -15809,7 +16004,7 @@
             <a:r>
               <a:rPr b="1" lang="en" sz="1100">
                 <a:solidFill>
-                  <a:srgbClr val="FFFFFF"/>
+                  <a:srgbClr val="141414"/>
                 </a:solidFill>
                 <a:latin typeface="Nunito"/>
                 <a:ea typeface="Nunito"/>
@@ -15875,6 +16070,11 @@
               <a:buNone/>
             </a:pPr>
             <a:r>
+              <a:rPr b="1">
+                <a:solidFill>
+                  <a:srgbClr val="141414"/>
+                </a:solidFill>
+              </a:rPr>
               <a:t/>
             </a:r>
             <a:endParaRPr/>
@@ -15924,16 +16124,16 @@
               <a:buNone/>
             </a:pPr>
             <a:r>
-              <a:rPr i="1" lang="en" sz="900">
-                <a:solidFill>
-                  <a:srgbClr val="6B7573"/>
+              <a:rPr i="1" lang="en" sz="900" b="1">
+                <a:solidFill>
+                  <a:srgbClr val="141414"/>
                 </a:solidFill>
                 <a:latin typeface="Nunito"/>
                 <a:ea typeface="Nunito"/>
                 <a:cs typeface="Nunito"/>
                 <a:sym typeface="Nunito"/>
               </a:rPr>
-              <a:t>Live catalogue KES 2,200–15,200 (~US$17–$118) across 28 crafts. Modeled below typical OTA 20–30% commissions (Viator / GetYourGuide) because checkout is native M-Pesa.</a:t>
+              <a:t>Live catalogue prices run from KES 2,200 to KES 15,200 (~US$17–$118) across 28 crafts. Global tour OTAs commonly take 20–30% (Viator ~20–25% base; GetYourGuide 20–30%). Aurora undercuts that with M-Pesa-native checkout — no card gateway friction where ~98% of mobile subscriptions use mobile money.</a:t>
             </a:r>
             <a:endParaRPr sz="900">
               <a:solidFill>
@@ -15986,6 +16186,11 @@
               <a:buNone/>
             </a:pPr>
             <a:r>
+              <a:rPr b="1">
+                <a:solidFill>
+                  <a:srgbClr val="141414"/>
+                </a:solidFill>
+              </a:rPr>
               <a:t/>
             </a:r>
             <a:endParaRPr/>
@@ -16034,7 +16239,7 @@
             <a:r>
               <a:rPr b="1" lang="en" sz="1100">
                 <a:solidFill>
-                  <a:srgbClr val="FFFFFF"/>
+                  <a:srgbClr val="141414"/>
                 </a:solidFill>
                 <a:latin typeface="Nunito"/>
                 <a:ea typeface="Nunito"/>
@@ -16100,6 +16305,11 @@
               <a:buNone/>
             </a:pPr>
             <a:r>
+              <a:rPr b="1">
+                <a:solidFill>
+                  <a:srgbClr val="141414"/>
+                </a:solidFill>
+              </a:rPr>
               <a:t/>
             </a:r>
             <a:endParaRPr/>
@@ -16149,16 +16359,16 @@
               <a:buNone/>
             </a:pPr>
             <a:r>
-              <a:rPr i="1" lang="en" sz="900">
-                <a:solidFill>
-                  <a:srgbClr val="6B7573"/>
+              <a:rPr i="1" lang="en" sz="900" b="1">
+                <a:solidFill>
+                  <a:srgbClr val="141414"/>
                 </a:solidFill>
                 <a:latin typeface="Nunito"/>
                 <a:ea typeface="Nunito"/>
                 <a:cs typeface="Nunito"/>
                 <a:sym typeface="Nunito"/>
               </a:rPr>
-              <a:t>Low CAC via university guide network and mapped shop partners. At modeled Y3 GMV US$45M and ~11% blended take-rate → ~US$5.0M platform revenue. LTV compounds across trips, crafts and guides.</a:t>
+              <a:t>Low CAC via university guide network and shops already mapped. At modeled Y3 GMV of US$45M and 11% blended take-rate → ~US$5.0M platform revenue. LTV compounds across repeat trips, multiple crafts and guide bookings.</a:t>
             </a:r>
             <a:endParaRPr sz="900">
               <a:solidFill>
@@ -16320,7 +16530,7 @@
             <a:r>
               <a:rPr b="1" lang="en" sz="1700">
                 <a:solidFill>
-                  <a:srgbClr val="028F35"/>
+                  <a:srgbClr val="141414"/>
                 </a:solidFill>
                 <a:latin typeface="Google Sans"/>
                 <a:ea typeface="Google Sans"/>
@@ -16381,9 +16591,9 @@
               <a:buNone/>
             </a:pPr>
             <a:r>
-              <a:rPr b="1" lang="en" sz="800">
-                <a:solidFill>
-                  <a:srgbClr val="6B7573"/>
+              <a:rPr b="1" lang="en" sz="1000">
+                <a:solidFill>
+                  <a:srgbClr val="141414"/>
                 </a:solidFill>
                 <a:latin typeface="Google Sans"/>
                 <a:ea typeface="Google Sans"/>
@@ -16446,7 +16656,7 @@
             <a:r>
               <a:rPr b="1" lang="en" sz="2400">
                 <a:solidFill>
-                  <a:srgbClr val="1F2323"/>
+                  <a:srgbClr val="141414"/>
                 </a:solidFill>
                 <a:latin typeface="Google Sans"/>
                 <a:ea typeface="Google Sans"/>
@@ -16509,14 +16719,14 @@
             <a:r>
               <a:rPr b="1" lang="en" sz="1100">
                 <a:solidFill>
-                  <a:srgbClr val="028F35"/>
+                  <a:srgbClr val="141414"/>
                 </a:solidFill>
                 <a:latin typeface="Google Sans"/>
                 <a:ea typeface="Google Sans"/>
                 <a:cs typeface="Google Sans"/>
                 <a:sym typeface="Google Sans"/>
               </a:rPr>
-              <a:t>Pre-launch product build — seeking pilot partners (not live revenue yet)</a:t>
+              <a:t>What's already built — pre-launch, seeking pilot partners</a:t>
             </a:r>
             <a:endParaRPr sz="1100">
               <a:solidFill>
@@ -16575,6 +16785,11 @@
               <a:buNone/>
             </a:pPr>
             <a:r>
+              <a:rPr b="1">
+                <a:solidFill>
+                  <a:srgbClr val="141414"/>
+                </a:solidFill>
+              </a:rPr>
               <a:t/>
             </a:r>
             <a:endParaRPr/>
@@ -16623,7 +16838,7 @@
             <a:r>
               <a:rPr b="1" lang="en" sz="1800">
                 <a:solidFill>
-                  <a:srgbClr val="028F35"/>
+                  <a:srgbClr val="141414"/>
                 </a:solidFill>
                 <a:latin typeface="Nunito"/>
                 <a:ea typeface="Nunito"/>
@@ -16684,16 +16899,16 @@
               <a:buNone/>
             </a:pPr>
             <a:r>
-              <a:rPr lang="en" sz="900">
-                <a:solidFill>
-                  <a:srgbClr val="1F2323"/>
+              <a:rPr lang="en" sz="900" b="1">
+                <a:solidFill>
+                  <a:srgbClr val="141414"/>
                 </a:solidFill>
                 <a:latin typeface="Nunito"/>
                 <a:ea typeface="Nunito"/>
                 <a:cs typeface="Nunito"/>
                 <a:sym typeface="Nunito"/>
               </a:rPr>
-              <a:t>Curated crafts listed</a:t>
+              <a:t>Curated crafts listed across 24+ named Kenyan shops (KES 2,200–15,200)</a:t>
             </a:r>
             <a:endParaRPr sz="900">
               <a:solidFill>
@@ -16752,6 +16967,11 @@
               <a:buNone/>
             </a:pPr>
             <a:r>
+              <a:rPr b="1">
+                <a:solidFill>
+                  <a:srgbClr val="141414"/>
+                </a:solidFill>
+              </a:rPr>
               <a:t/>
             </a:r>
             <a:endParaRPr/>
@@ -16800,14 +17020,14 @@
             <a:r>
               <a:rPr b="1" lang="en" sz="1800">
                 <a:solidFill>
-                  <a:srgbClr val="028F35"/>
+                  <a:srgbClr val="141414"/>
                 </a:solidFill>
                 <a:latin typeface="Nunito"/>
                 <a:ea typeface="Nunito"/>
                 <a:cs typeface="Nunito"/>
                 <a:sym typeface="Nunito"/>
               </a:rPr>
-              <a:t>24+</a:t>
+              <a:t>15</a:t>
             </a:r>
             <a:endParaRPr sz="1800">
               <a:solidFill>
@@ -16861,16 +17081,16 @@
               <a:buNone/>
             </a:pPr>
             <a:r>
-              <a:rPr lang="en" sz="900">
-                <a:solidFill>
-                  <a:srgbClr val="1F2323"/>
+              <a:rPr lang="en" sz="900" b="1">
+                <a:solidFill>
+                  <a:srgbClr val="141414"/>
                 </a:solidFill>
                 <a:latin typeface="Nunito"/>
                 <a:ea typeface="Nunito"/>
                 <a:cs typeface="Nunito"/>
                 <a:sym typeface="Nunito"/>
               </a:rPr>
-              <a:t>Named Kenyan shops mapped</a:t>
+              <a:t>Parks &amp; destinations mapped — 10 in Kenya + 5 across Africa</a:t>
             </a:r>
             <a:endParaRPr sz="900">
               <a:solidFill>
@@ -16929,6 +17149,11 @@
               <a:buNone/>
             </a:pPr>
             <a:r>
+              <a:rPr b="1">
+                <a:solidFill>
+                  <a:srgbClr val="141414"/>
+                </a:solidFill>
+              </a:rPr>
               <a:t/>
             </a:r>
             <a:endParaRPr/>
@@ -16977,14 +17202,14 @@
             <a:r>
               <a:rPr b="1" lang="en" sz="1800">
                 <a:solidFill>
-                  <a:srgbClr val="028F35"/>
+                  <a:srgbClr val="141414"/>
                 </a:solidFill>
                 <a:latin typeface="Nunito"/>
                 <a:ea typeface="Nunito"/>
                 <a:cs typeface="Nunito"/>
                 <a:sym typeface="Nunito"/>
               </a:rPr>
-              <a:t>Pre-rev</a:t>
+              <a:t>12</a:t>
             </a:r>
             <a:endParaRPr sz="1800">
               <a:solidFill>
@@ -17038,16 +17263,16 @@
               <a:buNone/>
             </a:pPr>
             <a:r>
-              <a:rPr lang="en" sz="900">
-                <a:solidFill>
-                  <a:srgbClr val="1F2323"/>
+              <a:rPr lang="en" sz="900" b="1">
+                <a:solidFill>
+                  <a:srgbClr val="141414"/>
                 </a:solidFill>
                 <a:latin typeface="Nunito"/>
                 <a:ea typeface="Nunito"/>
                 <a:cs typeface="Nunito"/>
                 <a:sym typeface="Nunito"/>
               </a:rPr>
-              <a:t>Seeking pilot capital</a:t>
+              <a:t>Vetted student guides from 12 Kenyan universities</a:t>
             </a:r>
             <a:endParaRPr sz="900">
               <a:solidFill>
@@ -17106,6 +17331,11 @@
               <a:buNone/>
             </a:pPr>
             <a:r>
+              <a:rPr b="1">
+                <a:solidFill>
+                  <a:srgbClr val="141414"/>
+                </a:solidFill>
+              </a:rPr>
               <a:t/>
             </a:r>
             <a:endParaRPr/>
@@ -17154,7 +17384,7 @@
             <a:r>
               <a:rPr b="1" lang="en" sz="1800">
                 <a:solidFill>
-                  <a:srgbClr val="028F35"/>
+                  <a:srgbClr val="141414"/>
                 </a:solidFill>
                 <a:latin typeface="Nunito"/>
                 <a:ea typeface="Nunito"/>
@@ -17215,16 +17445,16 @@
               <a:buNone/>
             </a:pPr>
             <a:r>
-              <a:rPr lang="en" sz="900">
-                <a:solidFill>
-                  <a:srgbClr val="1F2323"/>
+              <a:rPr lang="en" sz="900" b="1">
+                <a:solidFill>
+                  <a:srgbClr val="141414"/>
                 </a:solidFill>
                 <a:latin typeface="Nunito"/>
                 <a:ea typeface="Nunito"/>
                 <a:cs typeface="Nunito"/>
                 <a:sym typeface="Nunito"/>
               </a:rPr>
-              <a:t>Live M-Pesa STK Push</a:t>
+              <a:t>Working M-Pesa STK Push — live gateway, phone validation &amp; status polling</a:t>
             </a:r>
             <a:endParaRPr sz="900">
               <a:solidFill>
@@ -17359,7 +17589,7 @@
             <a:r>
               <a:rPr b="1" lang="en" sz="1700">
                 <a:solidFill>
-                  <a:srgbClr val="028F35"/>
+                  <a:srgbClr val="141414"/>
                 </a:solidFill>
                 <a:latin typeface="Google Sans"/>
                 <a:ea typeface="Google Sans"/>
@@ -17420,9 +17650,9 @@
               <a:buNone/>
             </a:pPr>
             <a:r>
-              <a:rPr b="1" lang="en" sz="800">
-                <a:solidFill>
-                  <a:srgbClr val="6B7573"/>
+              <a:rPr b="1" lang="en" sz="1000">
+                <a:solidFill>
+                  <a:srgbClr val="141414"/>
                 </a:solidFill>
                 <a:latin typeface="Google Sans"/>
                 <a:ea typeface="Google Sans"/>
@@ -17485,7 +17715,7 @@
             <a:r>
               <a:rPr b="1" lang="en" sz="2400">
                 <a:solidFill>
-                  <a:srgbClr val="1F2323"/>
+                  <a:srgbClr val="141414"/>
                 </a:solidFill>
                 <a:latin typeface="Google Sans"/>
                 <a:ea typeface="Google Sans"/>
@@ -17548,7 +17778,7 @@
             <a:r>
               <a:rPr b="1" lang="en" sz="1100">
                 <a:solidFill>
-                  <a:srgbClr val="028F35"/>
+                  <a:srgbClr val="141414"/>
                 </a:solidFill>
                 <a:latin typeface="Google Sans"/>
                 <a:ea typeface="Google Sans"/>
@@ -17661,9 +17891,9 @@
               <a:buNone/>
             </a:pPr>
             <a:r>
-              <a:rPr i="1" lang="en" sz="800">
-                <a:solidFill>
-                  <a:srgbClr val="6B7573"/>
+              <a:rPr i="1" lang="en" sz="1000" b="1">
+                <a:solidFill>
+                  <a:srgbClr val="141414"/>
                 </a:solidFill>
                 <a:latin typeface="Nunito"/>
                 <a:ea typeface="Nunito"/>
@@ -17724,9 +17954,9 @@
               <a:buNone/>
             </a:pPr>
             <a:r>
-              <a:rPr i="1" lang="en" sz="800">
-                <a:solidFill>
-                  <a:srgbClr val="6B7573"/>
+              <a:rPr i="1" lang="en" sz="1000" b="1">
+                <a:solidFill>
+                  <a:srgbClr val="141414"/>
                 </a:solidFill>
                 <a:latin typeface="Arial"/>
                 <a:ea typeface="Arial"/>
@@ -17792,6 +18022,11 @@
               <a:buNone/>
             </a:pPr>
             <a:r>
+              <a:rPr b="1">
+                <a:solidFill>
+                  <a:srgbClr val="141414"/>
+                </a:solidFill>
+              </a:rPr>
               <a:t/>
             </a:r>
             <a:endParaRPr/>
@@ -17838,9 +18073,9 @@
               <a:buNone/>
             </a:pPr>
             <a:r>
-              <a:rPr b="1" lang="en" sz="800">
-                <a:solidFill>
-                  <a:srgbClr val="FFFFFF"/>
+              <a:rPr b="1" lang="en" sz="1000">
+                <a:solidFill>
+                  <a:srgbClr val="141414"/>
                 </a:solidFill>
                 <a:latin typeface="Nunito"/>
                 <a:ea typeface="Nunito"/>
@@ -17906,6 +18141,11 @@
               <a:buNone/>
             </a:pPr>
             <a:r>
+              <a:rPr b="1">
+                <a:solidFill>
+                  <a:srgbClr val="141414"/>
+                </a:solidFill>
+              </a:rPr>
               <a:t/>
             </a:r>
             <a:endParaRPr>
@@ -17957,9 +18197,9 @@
               <a:buNone/>
             </a:pPr>
             <a:r>
-              <a:rPr lang="en" sz="700">
-                <a:solidFill>
-                  <a:srgbClr val="6B7573"/>
+              <a:rPr lang="en" sz="1000" b="1">
+                <a:solidFill>
+                  <a:srgbClr val="141414"/>
                 </a:solidFill>
                 <a:latin typeface="Nunito"/>
                 <a:ea typeface="Nunito"/>
@@ -18025,6 +18265,11 @@
               <a:buNone/>
             </a:pPr>
             <a:r>
+              <a:rPr b="1">
+                <a:solidFill>
+                  <a:srgbClr val="141414"/>
+                </a:solidFill>
+              </a:rPr>
               <a:t/>
             </a:r>
             <a:endParaRPr>
@@ -18076,9 +18321,9 @@
               <a:buNone/>
             </a:pPr>
             <a:r>
-              <a:rPr lang="en" sz="700">
-                <a:solidFill>
-                  <a:srgbClr val="6B7573"/>
+              <a:rPr lang="en" sz="1000" b="1">
+                <a:solidFill>
+                  <a:srgbClr val="141414"/>
                 </a:solidFill>
                 <a:latin typeface="Nunito"/>
                 <a:ea typeface="Nunito"/>
@@ -18144,6 +18389,11 @@
               <a:buNone/>
             </a:pPr>
             <a:r>
+              <a:rPr b="1">
+                <a:solidFill>
+                  <a:srgbClr val="141414"/>
+                </a:solidFill>
+              </a:rPr>
               <a:t/>
             </a:r>
             <a:endParaRPr>
@@ -18195,9 +18445,9 @@
               <a:buNone/>
             </a:pPr>
             <a:r>
-              <a:rPr lang="en" sz="700">
-                <a:solidFill>
-                  <a:srgbClr val="6B7573"/>
+              <a:rPr lang="en" sz="1000" b="1">
+                <a:solidFill>
+                  <a:srgbClr val="141414"/>
                 </a:solidFill>
                 <a:latin typeface="Nunito"/>
                 <a:ea typeface="Nunito"/>
@@ -18263,6 +18513,11 @@
               <a:buNone/>
             </a:pPr>
             <a:r>
+              <a:rPr b="1">
+                <a:solidFill>
+                  <a:srgbClr val="141414"/>
+                </a:solidFill>
+              </a:rPr>
               <a:t/>
             </a:r>
             <a:endParaRPr/>
@@ -18312,16 +18567,16 @@
               <a:buNone/>
             </a:pPr>
             <a:r>
-              <a:rPr i="1" lang="en" sz="900">
-                <a:solidFill>
-                  <a:srgbClr val="6B7573"/>
+              <a:rPr i="1" lang="en" sz="900" b="1">
+                <a:solidFill>
+                  <a:srgbClr val="141414"/>
                 </a:solidFill>
                 <a:latin typeface="Arial"/>
                 <a:ea typeface="Arial"/>
                 <a:cs typeface="Arial"/>
                 <a:sym typeface="Arial"/>
               </a:rPr>
-              <a:t>• Global OTAs charge 20–30% and are card-first; they don’t sell named Kenyan artisan shops or student guides.</a:t>
+              <a:t>• Global OTAs charge 20–30% commission and don't touch M-Pesa or named artisan shops. Aurora does both, natively — where mobile money reaches ~98% of mobile subscriptions.</a:t>
             </a:r>
             <a:endParaRPr sz="900">
               <a:solidFill>
@@ -18352,7 +18607,12 @@
               <a:buNone/>
             </a:pPr>
             <a:r>
-              <a:t>• SafariBookings lists tours but does not process payment or sell crafts/guides directly.</a:t>
+              <a:rPr b="1">
+                <a:solidFill>
+                  <a:srgbClr val="141414"/>
+                </a:solidFill>
+              </a:rPr>
+              <a:t>• SafariBookings aggregates operator tours but does not process payment or sell crafts/guides directly. Viator, GetYourGuide and Klook are card-first and generic.</a:t>
             </a:r>
             <a:endParaRPr sz="900">
               <a:solidFill>
@@ -18383,16 +18643,16 @@
               <a:buNone/>
             </a:pPr>
             <a:r>
-              <a:rPr i="1" lang="en" sz="900">
-                <a:solidFill>
-                  <a:srgbClr val="6B7573"/>
+              <a:rPr i="1" lang="en" sz="900" b="1">
+                <a:solidFill>
+                  <a:srgbClr val="141414"/>
                 </a:solidFill>
                 <a:latin typeface="Arial"/>
                 <a:ea typeface="Arial"/>
                 <a:cs typeface="Arial"/>
                 <a:sym typeface="Arial"/>
               </a:rPr>
-              <a:t>• Defensible advantage: M-Pesa-native checkout + verified local shops/guides in one Kenya-first journey (~98% mobile-money reach).</a:t>
+              <a:t>• Defensible advantage: M-Pesa-native checkout + verified local shops/guides in one Kenya-first journey.</a:t>
             </a:r>
             <a:endParaRPr sz="900">
               <a:solidFill>
@@ -18423,6 +18683,11 @@
               <a:buNone/>
             </a:pPr>
             <a:r>
+              <a:rPr b="1">
+                <a:solidFill>
+                  <a:srgbClr val="141414"/>
+                </a:solidFill>
+              </a:rPr>
               <a:t/>
             </a:r>
             <a:endParaRPr sz="900">
@@ -18454,9 +18719,9 @@
               <a:buNone/>
             </a:pPr>
             <a:r>
-              <a:rPr i="1" lang="en" sz="900">
-                <a:solidFill>
-                  <a:srgbClr val="6B7573"/>
+              <a:rPr i="1" lang="en" sz="900" b="1">
+                <a:solidFill>
+                  <a:srgbClr val="141414"/>
                 </a:solidFill>
                 <a:latin typeface="Arial"/>
                 <a:ea typeface="Arial"/>
@@ -18625,7 +18890,7 @@
             <a:r>
               <a:rPr b="1" lang="en" sz="1700">
                 <a:solidFill>
-                  <a:srgbClr val="028F35"/>
+                  <a:srgbClr val="141414"/>
                 </a:solidFill>
                 <a:latin typeface="Google Sans"/>
                 <a:ea typeface="Google Sans"/>
@@ -18686,9 +18951,9 @@
               <a:buNone/>
             </a:pPr>
             <a:r>
-              <a:rPr b="1" lang="en" sz="800">
-                <a:solidFill>
-                  <a:srgbClr val="6B7573"/>
+              <a:rPr b="1" lang="en" sz="1000">
+                <a:solidFill>
+                  <a:srgbClr val="141414"/>
                 </a:solidFill>
                 <a:latin typeface="Google Sans"/>
                 <a:ea typeface="Google Sans"/>
@@ -18751,7 +19016,7 @@
             <a:r>
               <a:rPr b="1" lang="en" sz="2400">
                 <a:solidFill>
-                  <a:srgbClr val="1F2323"/>
+                  <a:srgbClr val="141414"/>
                 </a:solidFill>
                 <a:latin typeface="Google Sans"/>
                 <a:ea typeface="Google Sans"/>
@@ -18814,14 +19079,14 @@
             <a:r>
               <a:rPr b="1" lang="en" sz="1100">
                 <a:solidFill>
-                  <a:srgbClr val="028F35"/>
+                  <a:srgbClr val="141414"/>
                 </a:solidFill>
                 <a:latin typeface="Google Sans"/>
                 <a:ea typeface="Google Sans"/>
                 <a:cs typeface="Google Sans"/>
                 <a:sym typeface="Google Sans"/>
               </a:rPr>
-              <a:t>How you'll acquire and scale users</a:t>
+              <a:t>How Aurora Travels acquires and scales users</a:t>
             </a:r>
             <a:endParaRPr sz="1100">
               <a:solidFill>
@@ -18874,6 +19139,11 @@
               <a:buNone/>
             </a:pPr>
             <a:r>
+              <a:rPr b="1">
+                <a:solidFill>
+                  <a:srgbClr val="141414"/>
+                </a:solidFill>
+              </a:rPr>
               <a:t/>
             </a:r>
             <a:endParaRPr/>
@@ -18922,7 +19192,7 @@
             <a:r>
               <a:rPr b="1" lang="en" sz="1000">
                 <a:solidFill>
-                  <a:srgbClr val="FFFFFF"/>
+                  <a:srgbClr val="141414"/>
                 </a:solidFill>
                 <a:latin typeface="Nunito"/>
                 <a:ea typeface="Nunito"/>
@@ -18988,6 +19258,11 @@
               <a:buNone/>
             </a:pPr>
             <a:r>
+              <a:rPr b="1">
+                <a:solidFill>
+                  <a:srgbClr val="141414"/>
+                </a:solidFill>
+              </a:rPr>
               <a:t/>
             </a:r>
             <a:endParaRPr/>
@@ -19037,16 +19312,16 @@
               <a:buNone/>
             </a:pPr>
             <a:r>
-              <a:rPr i="1" lang="en" sz="900">
-                <a:solidFill>
-                  <a:srgbClr val="6B7573"/>
+              <a:rPr i="1" lang="en" sz="900" b="1">
+                <a:solidFill>
+                  <a:srgbClr val="141414"/>
                 </a:solidFill>
                 <a:latin typeface="Nunito"/>
                 <a:ea typeface="Nunito"/>
                 <a:cs typeface="Nunito"/>
                 <a:sym typeface="Nunito"/>
               </a:rPr>
-              <a:t>Nairobi + Maasai Mara gateway (Narok). Onboard mapped shops — Maasai Market, Tabaka Soapstone, Wamunyu Carvers, Kazuri — and first university guide cohort. Target: 40 shops, 40 guides, first 5,000 paid transactions.</a:t>
+              <a:t>Nairobi and the Maasai Mara gateway (Narok). Onboard shop partners already mapped — Maasai Market Nairobi, Tabaka Soapstone (Kisii), Wamunyu Carvers (Machakos), Kazuri Beads — and the first guide cohort from partner universities. Target: 40 shops, 40 guides, first 5,000 paid transactions.</a:t>
             </a:r>
             <a:endParaRPr sz="900">
               <a:solidFill>
@@ -19099,6 +19374,11 @@
               <a:buNone/>
             </a:pPr>
             <a:r>
+              <a:rPr b="1">
+                <a:solidFill>
+                  <a:srgbClr val="141414"/>
+                </a:solidFill>
+              </a:rPr>
               <a:t/>
             </a:r>
             <a:endParaRPr/>
@@ -19147,7 +19427,7 @@
             <a:r>
               <a:rPr b="1" lang="en" sz="1000">
                 <a:solidFill>
-                  <a:srgbClr val="FFFFFF"/>
+                  <a:srgbClr val="141414"/>
                 </a:solidFill>
                 <a:latin typeface="Nunito"/>
                 <a:ea typeface="Nunito"/>
@@ -19213,6 +19493,11 @@
               <a:buNone/>
             </a:pPr>
             <a:r>
+              <a:rPr b="1">
+                <a:solidFill>
+                  <a:srgbClr val="141414"/>
+                </a:solidFill>
+              </a:rPr>
               <a:t/>
             </a:r>
             <a:endParaRPr/>
@@ -19262,16 +19547,16 @@
               <a:buNone/>
             </a:pPr>
             <a:r>
-              <a:rPr i="1" lang="en" sz="900">
-                <a:solidFill>
-                  <a:srgbClr val="6B7573"/>
+              <a:rPr i="1" lang="en" sz="900" b="1">
+                <a:solidFill>
+                  <a:srgbClr val="141414"/>
                 </a:solidFill>
                 <a:latin typeface="Nunito"/>
                 <a:ea typeface="Nunito"/>
                 <a:cs typeface="Nunito"/>
                 <a:sym typeface="Nunito"/>
               </a:rPr>
-              <a:t>Extend across more of Kenya’s 47 counties toward 2027 targets (5.5M international arrivals; KES 1T earnings). Prioritise 2025 top source markets: US, Uganda, Tanzania, UK.</a:t>
+              <a:t>Extend across more of Kenya's 47 counties toward the government's 2027 ambition of 5.5M international arrivals and KES 1T tourism earnings. Prioritise 2025 top source markets: United States, Uganda, Tanzania and the United Kingdom (Ministry report).</a:t>
             </a:r>
             <a:endParaRPr sz="900">
               <a:solidFill>
@@ -19324,6 +19609,11 @@
               <a:buNone/>
             </a:pPr>
             <a:r>
+              <a:rPr b="1">
+                <a:solidFill>
+                  <a:srgbClr val="141414"/>
+                </a:solidFill>
+              </a:rPr>
               <a:t/>
             </a:r>
             <a:endParaRPr/>
@@ -19372,7 +19662,7 @@
             <a:r>
               <a:rPr b="1" lang="en" sz="1000">
                 <a:solidFill>
-                  <a:srgbClr val="FFFFFF"/>
+                  <a:srgbClr val="141414"/>
                 </a:solidFill>
                 <a:latin typeface="Nunito"/>
                 <a:ea typeface="Nunito"/>
@@ -19438,6 +19728,11 @@
               <a:buNone/>
             </a:pPr>
             <a:r>
+              <a:rPr b="1">
+                <a:solidFill>
+                  <a:srgbClr val="141414"/>
+                </a:solidFill>
+              </a:rPr>
               <a:t/>
             </a:r>
             <a:endParaRPr/>
@@ -19487,16 +19782,16 @@
               <a:buNone/>
             </a:pPr>
             <a:r>
-              <a:rPr i="1" lang="en" sz="900">
-                <a:solidFill>
-                  <a:srgbClr val="6B7573"/>
+              <a:rPr i="1" lang="en" sz="900" b="1">
+                <a:solidFill>
+                  <a:srgbClr val="141414"/>
                 </a:solidFill>
                 <a:latin typeface="Nunito"/>
                 <a:ea typeface="Nunito"/>
                 <a:cs typeface="Nunito"/>
                 <a:sym typeface="Nunito"/>
               </a:rPr>
-              <a:t>Expand into the East African safari circuit (Tanzania, Uganda) already on Aurora’s park map — Mara–Serengeti / Great Rift corridor — with cross-border craft and guide networks.</a:t>
+              <a:t>Expand into the shared East African safari circuit (Tanzania, Uganda) that Aurora's park map already spans — the Great Rift / Mara–Serengeti ecosystem — with cross-border M-Pesa and craft corridors.</a:t>
             </a:r>
             <a:endParaRPr sz="900">
               <a:solidFill>
